--- a/images/Presentación2.pptx
+++ b/images/Presentación2.pptx
@@ -302,7 +302,7 @@
           <a:p>
             <a:fld id="{9E2B9D65-9CB5-44CB-B647-17247A1ADF60}" type="datetimeFigureOut">
               <a:rPr lang="es-ES" smtClean="0"/>
-              <a:t>08/09/2025</a:t>
+              <a:t>30/07/2026</a:t>
             </a:fld>
             <a:endParaRPr lang="es-ES"/>
           </a:p>
@@ -470,7 +470,7 @@
           <a:p>
             <a:fld id="{9E2B9D65-9CB5-44CB-B647-17247A1ADF60}" type="datetimeFigureOut">
               <a:rPr lang="es-ES" smtClean="0"/>
-              <a:t>08/09/2025</a:t>
+              <a:t>30/07/2026</a:t>
             </a:fld>
             <a:endParaRPr lang="es-ES"/>
           </a:p>
@@ -648,7 +648,7 @@
           <a:p>
             <a:fld id="{9E2B9D65-9CB5-44CB-B647-17247A1ADF60}" type="datetimeFigureOut">
               <a:rPr lang="es-ES" smtClean="0"/>
-              <a:t>08/09/2025</a:t>
+              <a:t>30/07/2026</a:t>
             </a:fld>
             <a:endParaRPr lang="es-ES"/>
           </a:p>
@@ -816,7 +816,7 @@
           <a:p>
             <a:fld id="{9E2B9D65-9CB5-44CB-B647-17247A1ADF60}" type="datetimeFigureOut">
               <a:rPr lang="es-ES" smtClean="0"/>
-              <a:t>08/09/2025</a:t>
+              <a:t>30/07/2026</a:t>
             </a:fld>
             <a:endParaRPr lang="es-ES"/>
           </a:p>
@@ -1061,7 +1061,7 @@
           <a:p>
             <a:fld id="{9E2B9D65-9CB5-44CB-B647-17247A1ADF60}" type="datetimeFigureOut">
               <a:rPr lang="es-ES" smtClean="0"/>
-              <a:t>08/09/2025</a:t>
+              <a:t>30/07/2026</a:t>
             </a:fld>
             <a:endParaRPr lang="es-ES"/>
           </a:p>
@@ -1346,7 +1346,7 @@
           <a:p>
             <a:fld id="{9E2B9D65-9CB5-44CB-B647-17247A1ADF60}" type="datetimeFigureOut">
               <a:rPr lang="es-ES" smtClean="0"/>
-              <a:t>08/09/2025</a:t>
+              <a:t>30/07/2026</a:t>
             </a:fld>
             <a:endParaRPr lang="es-ES"/>
           </a:p>
@@ -1765,7 +1765,7 @@
           <a:p>
             <a:fld id="{9E2B9D65-9CB5-44CB-B647-17247A1ADF60}" type="datetimeFigureOut">
               <a:rPr lang="es-ES" smtClean="0"/>
-              <a:t>08/09/2025</a:t>
+              <a:t>30/07/2026</a:t>
             </a:fld>
             <a:endParaRPr lang="es-ES"/>
           </a:p>
@@ -1882,7 +1882,7 @@
           <a:p>
             <a:fld id="{9E2B9D65-9CB5-44CB-B647-17247A1ADF60}" type="datetimeFigureOut">
               <a:rPr lang="es-ES" smtClean="0"/>
-              <a:t>08/09/2025</a:t>
+              <a:t>30/07/2026</a:t>
             </a:fld>
             <a:endParaRPr lang="es-ES"/>
           </a:p>
@@ -1977,7 +1977,7 @@
           <a:p>
             <a:fld id="{9E2B9D65-9CB5-44CB-B647-17247A1ADF60}" type="datetimeFigureOut">
               <a:rPr lang="es-ES" smtClean="0"/>
-              <a:t>08/09/2025</a:t>
+              <a:t>30/07/2026</a:t>
             </a:fld>
             <a:endParaRPr lang="es-ES"/>
           </a:p>
@@ -2252,7 +2252,7 @@
           <a:p>
             <a:fld id="{9E2B9D65-9CB5-44CB-B647-17247A1ADF60}" type="datetimeFigureOut">
               <a:rPr lang="es-ES" smtClean="0"/>
-              <a:t>08/09/2025</a:t>
+              <a:t>30/07/2026</a:t>
             </a:fld>
             <a:endParaRPr lang="es-ES"/>
           </a:p>
@@ -2504,7 +2504,7 @@
           <a:p>
             <a:fld id="{9E2B9D65-9CB5-44CB-B647-17247A1ADF60}" type="datetimeFigureOut">
               <a:rPr lang="es-ES" smtClean="0"/>
-              <a:t>08/09/2025</a:t>
+              <a:t>30/07/2026</a:t>
             </a:fld>
             <a:endParaRPr lang="es-ES"/>
           </a:p>
@@ -2715,7 +2715,7 @@
           <a:p>
             <a:fld id="{9E2B9D65-9CB5-44CB-B647-17247A1ADF60}" type="datetimeFigureOut">
               <a:rPr lang="es-ES" smtClean="0"/>
-              <a:t>08/09/2025</a:t>
+              <a:t>30/07/2026</a:t>
             </a:fld>
             <a:endParaRPr lang="es-ES"/>
           </a:p>
@@ -3349,7 +3349,7 @@
             </a:r>
             <a:r>
               <a:rPr lang="es-ES" b="1"/>
-              <a:t>infer2025</a:t>
+              <a:t>infer2026</a:t>
             </a:r>
             <a:endParaRPr lang="es-ES" b="1" dirty="0"/>
           </a:p>
